--- a/templates/animated/chart/animated_bar_chart_minimalist_bw.pptx
+++ b/templates/animated/chart/animated_bar_chart_minimalist_bw.pptx
@@ -3123,11 +3123,1551 @@
           </a:p>
         </p:txBody>
       </p:sp>
+      <p:sp>
+        <p:nvSpPr>
+          <p:cNvPr id="3" name="TextBox 2"/>
+          <p:cNvSpPr txBox="1"/>
+          <p:nvPr/>
+        </p:nvSpPr>
+        <p:spPr>
+          <a:xfrm>
+            <a:off x="365760" y="5650992"/>
+            <a:ext cx="640080" cy="219456"/>
+          </a:xfrm>
+          <a:prstGeom prst="rect">
+            <a:avLst/>
+          </a:prstGeom>
+          <a:noFill/>
+        </p:spPr>
+        <p:txBody>
+          <a:bodyPr wrap="square">
+            <a:spAutoFit/>
+          </a:bodyPr>
+          <a:lstStyle/>
+          <a:p>
+            <a:pPr algn="r">
+              <a:defRPr sz="900" b="0">
+                <a:solidFill>
+                  <a:srgbClr val="7F8C8D"/>
+                </a:solidFill>
+              </a:defRPr>
+            </a:pPr>
+            <a:r>
+              <a:t>0</a:t>
+            </a:r>
+          </a:p>
+        </p:txBody>
+      </p:sp>
+      <p:cxnSp>
+        <p:nvCxnSpPr>
+          <p:cNvPr id="4" name="Connector 3"/>
+          <p:cNvCxnSpPr/>
+          <p:nvPr/>
+        </p:nvCxnSpPr>
+        <p:spPr>
+          <a:xfrm>
+            <a:off x="1097280" y="4882896"/>
+            <a:ext cx="7589520" cy="0"/>
+          </a:xfrm>
+          <a:prstGeom prst="line">
+            <a:avLst/>
+          </a:prstGeom>
+          <a:ln w="9525">
+            <a:solidFill>
+              <a:srgbClr val="ECF0F1"/>
+            </a:solidFill>
+          </a:ln>
+        </p:spPr>
+        <p:style>
+          <a:lnRef idx="2">
+            <a:schemeClr val="accent1"/>
+          </a:lnRef>
+          <a:fillRef idx="0">
+            <a:schemeClr val="accent1"/>
+          </a:fillRef>
+          <a:effectRef idx="1">
+            <a:schemeClr val="accent1"/>
+          </a:effectRef>
+          <a:fontRef idx="minor">
+            <a:schemeClr val="tx1"/>
+          </a:fontRef>
+        </p:style>
+      </p:cxnSp>
+      <p:sp>
+        <p:nvSpPr>
+          <p:cNvPr id="5" name="TextBox 4"/>
+          <p:cNvSpPr txBox="1"/>
+          <p:nvPr/>
+        </p:nvSpPr>
+        <p:spPr>
+          <a:xfrm>
+            <a:off x="365760" y="4773168"/>
+            <a:ext cx="640080" cy="219456"/>
+          </a:xfrm>
+          <a:prstGeom prst="rect">
+            <a:avLst/>
+          </a:prstGeom>
+          <a:noFill/>
+        </p:spPr>
+        <p:txBody>
+          <a:bodyPr wrap="square">
+            <a:spAutoFit/>
+          </a:bodyPr>
+          <a:lstStyle/>
+          <a:p>
+            <a:pPr algn="r">
+              <a:defRPr sz="900" b="0">
+                <a:solidFill>
+                  <a:srgbClr val="7F8C8D"/>
+                </a:solidFill>
+              </a:defRPr>
+            </a:pPr>
+            <a:r>
+              <a:t>69</a:t>
+            </a:r>
+          </a:p>
+        </p:txBody>
+      </p:sp>
+      <p:cxnSp>
+        <p:nvCxnSpPr>
+          <p:cNvPr id="6" name="Connector 5"/>
+          <p:cNvCxnSpPr/>
+          <p:nvPr/>
+        </p:nvCxnSpPr>
+        <p:spPr>
+          <a:xfrm>
+            <a:off x="1097280" y="4005072"/>
+            <a:ext cx="7589520" cy="0"/>
+          </a:xfrm>
+          <a:prstGeom prst="line">
+            <a:avLst/>
+          </a:prstGeom>
+          <a:ln w="9525">
+            <a:solidFill>
+              <a:srgbClr val="ECF0F1"/>
+            </a:solidFill>
+          </a:ln>
+        </p:spPr>
+        <p:style>
+          <a:lnRef idx="2">
+            <a:schemeClr val="accent1"/>
+          </a:lnRef>
+          <a:fillRef idx="0">
+            <a:schemeClr val="accent1"/>
+          </a:fillRef>
+          <a:effectRef idx="1">
+            <a:schemeClr val="accent1"/>
+          </a:effectRef>
+          <a:fontRef idx="minor">
+            <a:schemeClr val="tx1"/>
+          </a:fontRef>
+        </p:style>
+      </p:cxnSp>
+      <p:sp>
+        <p:nvSpPr>
+          <p:cNvPr id="7" name="TextBox 6"/>
+          <p:cNvSpPr txBox="1"/>
+          <p:nvPr/>
+        </p:nvSpPr>
+        <p:spPr>
+          <a:xfrm>
+            <a:off x="365760" y="3895344"/>
+            <a:ext cx="640080" cy="219456"/>
+          </a:xfrm>
+          <a:prstGeom prst="rect">
+            <a:avLst/>
+          </a:prstGeom>
+          <a:noFill/>
+        </p:spPr>
+        <p:txBody>
+          <a:bodyPr wrap="square">
+            <a:spAutoFit/>
+          </a:bodyPr>
+          <a:lstStyle/>
+          <a:p>
+            <a:pPr algn="r">
+              <a:defRPr sz="900" b="0">
+                <a:solidFill>
+                  <a:srgbClr val="7F8C8D"/>
+                </a:solidFill>
+              </a:defRPr>
+            </a:pPr>
+            <a:r>
+              <a:t>137</a:t>
+            </a:r>
+          </a:p>
+        </p:txBody>
+      </p:sp>
+      <p:cxnSp>
+        <p:nvCxnSpPr>
+          <p:cNvPr id="8" name="Connector 7"/>
+          <p:cNvCxnSpPr/>
+          <p:nvPr/>
+        </p:nvCxnSpPr>
+        <p:spPr>
+          <a:xfrm>
+            <a:off x="1097280" y="3127248"/>
+            <a:ext cx="7589520" cy="0"/>
+          </a:xfrm>
+          <a:prstGeom prst="line">
+            <a:avLst/>
+          </a:prstGeom>
+          <a:ln w="9525">
+            <a:solidFill>
+              <a:srgbClr val="ECF0F1"/>
+            </a:solidFill>
+          </a:ln>
+        </p:spPr>
+        <p:style>
+          <a:lnRef idx="2">
+            <a:schemeClr val="accent1"/>
+          </a:lnRef>
+          <a:fillRef idx="0">
+            <a:schemeClr val="accent1"/>
+          </a:fillRef>
+          <a:effectRef idx="1">
+            <a:schemeClr val="accent1"/>
+          </a:effectRef>
+          <a:fontRef idx="minor">
+            <a:schemeClr val="tx1"/>
+          </a:fontRef>
+        </p:style>
+      </p:cxnSp>
+      <p:sp>
+        <p:nvSpPr>
+          <p:cNvPr id="9" name="TextBox 8"/>
+          <p:cNvSpPr txBox="1"/>
+          <p:nvPr/>
+        </p:nvSpPr>
+        <p:spPr>
+          <a:xfrm>
+            <a:off x="365760" y="3017520"/>
+            <a:ext cx="640080" cy="219456"/>
+          </a:xfrm>
+          <a:prstGeom prst="rect">
+            <a:avLst/>
+          </a:prstGeom>
+          <a:noFill/>
+        </p:spPr>
+        <p:txBody>
+          <a:bodyPr wrap="square">
+            <a:spAutoFit/>
+          </a:bodyPr>
+          <a:lstStyle/>
+          <a:p>
+            <a:pPr algn="r">
+              <a:defRPr sz="900" b="0">
+                <a:solidFill>
+                  <a:srgbClr val="7F8C8D"/>
+                </a:solidFill>
+              </a:defRPr>
+            </a:pPr>
+            <a:r>
+              <a:t>206</a:t>
+            </a:r>
+          </a:p>
+        </p:txBody>
+      </p:sp>
+      <p:cxnSp>
+        <p:nvCxnSpPr>
+          <p:cNvPr id="10" name="Connector 9"/>
+          <p:cNvCxnSpPr/>
+          <p:nvPr/>
+        </p:nvCxnSpPr>
+        <p:spPr>
+          <a:xfrm>
+            <a:off x="1097280" y="2249424"/>
+            <a:ext cx="7589520" cy="0"/>
+          </a:xfrm>
+          <a:prstGeom prst="line">
+            <a:avLst/>
+          </a:prstGeom>
+          <a:ln w="9525">
+            <a:solidFill>
+              <a:srgbClr val="ECF0F1"/>
+            </a:solidFill>
+          </a:ln>
+        </p:spPr>
+        <p:style>
+          <a:lnRef idx="2">
+            <a:schemeClr val="accent1"/>
+          </a:lnRef>
+          <a:fillRef idx="0">
+            <a:schemeClr val="accent1"/>
+          </a:fillRef>
+          <a:effectRef idx="1">
+            <a:schemeClr val="accent1"/>
+          </a:effectRef>
+          <a:fontRef idx="minor">
+            <a:schemeClr val="tx1"/>
+          </a:fontRef>
+        </p:style>
+      </p:cxnSp>
+      <p:sp>
+        <p:nvSpPr>
+          <p:cNvPr id="11" name="TextBox 10"/>
+          <p:cNvSpPr txBox="1"/>
+          <p:nvPr/>
+        </p:nvSpPr>
+        <p:spPr>
+          <a:xfrm>
+            <a:off x="365760" y="2139696"/>
+            <a:ext cx="640080" cy="219456"/>
+          </a:xfrm>
+          <a:prstGeom prst="rect">
+            <a:avLst/>
+          </a:prstGeom>
+          <a:noFill/>
+        </p:spPr>
+        <p:txBody>
+          <a:bodyPr wrap="square">
+            <a:spAutoFit/>
+          </a:bodyPr>
+          <a:lstStyle/>
+          <a:p>
+            <a:pPr algn="r">
+              <a:defRPr sz="900" b="0">
+                <a:solidFill>
+                  <a:srgbClr val="7F8C8D"/>
+                </a:solidFill>
+              </a:defRPr>
+            </a:pPr>
+            <a:r>
+              <a:t>274</a:t>
+            </a:r>
+          </a:p>
+        </p:txBody>
+      </p:sp>
+      <p:cxnSp>
+        <p:nvCxnSpPr>
+          <p:cNvPr id="12" name="Connector 11"/>
+          <p:cNvCxnSpPr/>
+          <p:nvPr/>
+        </p:nvCxnSpPr>
+        <p:spPr>
+          <a:xfrm>
+            <a:off x="1097280" y="1371600"/>
+            <a:ext cx="7589520" cy="0"/>
+          </a:xfrm>
+          <a:prstGeom prst="line">
+            <a:avLst/>
+          </a:prstGeom>
+          <a:ln w="9525">
+            <a:solidFill>
+              <a:srgbClr val="ECF0F1"/>
+            </a:solidFill>
+          </a:ln>
+        </p:spPr>
+        <p:style>
+          <a:lnRef idx="2">
+            <a:schemeClr val="accent1"/>
+          </a:lnRef>
+          <a:fillRef idx="0">
+            <a:schemeClr val="accent1"/>
+          </a:fillRef>
+          <a:effectRef idx="1">
+            <a:schemeClr val="accent1"/>
+          </a:effectRef>
+          <a:fontRef idx="minor">
+            <a:schemeClr val="tx1"/>
+          </a:fontRef>
+        </p:style>
+      </p:cxnSp>
+      <p:sp>
+        <p:nvSpPr>
+          <p:cNvPr id="13" name="TextBox 12"/>
+          <p:cNvSpPr txBox="1"/>
+          <p:nvPr/>
+        </p:nvSpPr>
+        <p:spPr>
+          <a:xfrm>
+            <a:off x="365760" y="1261872"/>
+            <a:ext cx="640080" cy="219456"/>
+          </a:xfrm>
+          <a:prstGeom prst="rect">
+            <a:avLst/>
+          </a:prstGeom>
+          <a:noFill/>
+        </p:spPr>
+        <p:txBody>
+          <a:bodyPr wrap="square">
+            <a:spAutoFit/>
+          </a:bodyPr>
+          <a:lstStyle/>
+          <a:p>
+            <a:pPr algn="r">
+              <a:defRPr sz="900" b="0">
+                <a:solidFill>
+                  <a:srgbClr val="7F8C8D"/>
+                </a:solidFill>
+              </a:defRPr>
+            </a:pPr>
+            <a:r>
+              <a:t>343</a:t>
+            </a:r>
+          </a:p>
+        </p:txBody>
+      </p:sp>
+      <p:cxnSp>
+        <p:nvCxnSpPr>
+          <p:cNvPr id="14" name="Connector 13"/>
+          <p:cNvCxnSpPr/>
+          <p:nvPr/>
+        </p:nvCxnSpPr>
+        <p:spPr>
+          <a:xfrm>
+            <a:off x="1097280" y="5760720"/>
+            <a:ext cx="7589520" cy="0"/>
+          </a:xfrm>
+          <a:prstGeom prst="line">
+            <a:avLst/>
+          </a:prstGeom>
+          <a:ln w="19050">
+            <a:solidFill>
+              <a:srgbClr val="BDC3C7"/>
+            </a:solidFill>
+          </a:ln>
+        </p:spPr>
+        <p:style>
+          <a:lnRef idx="2">
+            <a:schemeClr val="accent1"/>
+          </a:lnRef>
+          <a:fillRef idx="0">
+            <a:schemeClr val="accent1"/>
+          </a:fillRef>
+          <a:effectRef idx="1">
+            <a:schemeClr val="accent1"/>
+          </a:effectRef>
+          <a:fontRef idx="minor">
+            <a:schemeClr val="tx1"/>
+          </a:fontRef>
+        </p:style>
+      </p:cxnSp>
+      <p:sp>
+        <p:nvSpPr>
+          <p:cNvPr id="15" name="Rectangle 14"/>
+          <p:cNvSpPr/>
+          <p:nvPr/>
+        </p:nvSpPr>
+        <p:spPr>
+          <a:xfrm>
+            <a:off x="1476756" y="4223824"/>
+            <a:ext cx="822198" cy="1536896"/>
+          </a:xfrm>
+          <a:prstGeom prst="rect">
+            <a:avLst/>
+          </a:prstGeom>
+          <a:gradFill rotWithShape="1">
+            <a:gsLst>
+              <a:gs pos="0">
+                <a:srgbClr val="70D4FF"/>
+              </a:gs>
+              <a:gs pos="100000">
+                <a:srgbClr val="3498DB"/>
+              </a:gs>
+            </a:gsLst>
+            <a:lin scaled="0"/>
+          </a:gradFill>
+          <a:ln>
+            <a:noFill/>
+          </a:ln>
+        </p:spPr>
+        <p:style>
+          <a:lnRef idx="1">
+            <a:schemeClr val="accent1"/>
+          </a:lnRef>
+          <a:fillRef idx="3">
+            <a:schemeClr val="accent1"/>
+          </a:fillRef>
+          <a:effectRef idx="2">
+            <a:schemeClr val="accent1"/>
+          </a:effectRef>
+          <a:fontRef idx="minor">
+            <a:schemeClr val="lt1"/>
+          </a:fontRef>
+        </p:style>
+        <p:txBody>
+          <a:bodyPr rtlCol="0" anchor="ctr"/>
+          <a:lstStyle/>
+          <a:p>
+            <a:pPr algn="ctr"/>
+          </a:p>
+        </p:txBody>
+      </p:sp>
+      <p:sp>
+        <p:nvSpPr>
+          <p:cNvPr id="16" name="TextBox 15"/>
+          <p:cNvSpPr txBox="1"/>
+          <p:nvPr/>
+        </p:nvSpPr>
+        <p:spPr>
+          <a:xfrm>
+            <a:off x="1476756" y="3995224"/>
+            <a:ext cx="822198" cy="201168"/>
+          </a:xfrm>
+          <a:prstGeom prst="rect">
+            <a:avLst/>
+          </a:prstGeom>
+          <a:noFill/>
+        </p:spPr>
+        <p:txBody>
+          <a:bodyPr wrap="square">
+            <a:spAutoFit/>
+          </a:bodyPr>
+          <a:lstStyle/>
+          <a:p>
+            <a:pPr algn="ctr">
+              <a:defRPr sz="1000" b="1">
+                <a:solidFill>
+                  <a:srgbClr val="3498DB"/>
+                </a:solidFill>
+              </a:defRPr>
+            </a:pPr>
+            <a:r>
+              <a:t>120</a:t>
+            </a:r>
+          </a:p>
+        </p:txBody>
+      </p:sp>
+      <p:sp>
+        <p:nvSpPr>
+          <p:cNvPr id="17" name="TextBox 16"/>
+          <p:cNvSpPr txBox="1"/>
+          <p:nvPr/>
+        </p:nvSpPr>
+        <p:spPr>
+          <a:xfrm>
+            <a:off x="1476756" y="5806440"/>
+            <a:ext cx="822198" cy="274320"/>
+          </a:xfrm>
+          <a:prstGeom prst="rect">
+            <a:avLst/>
+          </a:prstGeom>
+          <a:noFill/>
+        </p:spPr>
+        <p:txBody>
+          <a:bodyPr wrap="square">
+            <a:spAutoFit/>
+          </a:bodyPr>
+          <a:lstStyle/>
+          <a:p>
+            <a:pPr algn="ctr">
+              <a:defRPr sz="1000" b="0">
+                <a:solidFill>
+                  <a:srgbClr val="555555"/>
+                </a:solidFill>
+              </a:defRPr>
+            </a:pPr>
+            <a:r>
+              <a:t>Q1</a:t>
+            </a:r>
+          </a:p>
+        </p:txBody>
+      </p:sp>
+      <p:sp>
+        <p:nvSpPr>
+          <p:cNvPr id="18" name="Rectangle 17"/>
+          <p:cNvSpPr/>
+          <p:nvPr/>
+        </p:nvSpPr>
+        <p:spPr>
+          <a:xfrm>
+            <a:off x="2678430" y="3609066"/>
+            <a:ext cx="822198" cy="2151654"/>
+          </a:xfrm>
+          <a:prstGeom prst="rect">
+            <a:avLst/>
+          </a:prstGeom>
+          <a:gradFill rotWithShape="1">
+            <a:gsLst>
+              <a:gs pos="0">
+                <a:srgbClr val="FF8878"/>
+              </a:gs>
+              <a:gs pos="100000">
+                <a:srgbClr val="E74C3C"/>
+              </a:gs>
+            </a:gsLst>
+            <a:lin scaled="0"/>
+          </a:gradFill>
+          <a:ln>
+            <a:noFill/>
+          </a:ln>
+        </p:spPr>
+        <p:style>
+          <a:lnRef idx="1">
+            <a:schemeClr val="accent1"/>
+          </a:lnRef>
+          <a:fillRef idx="3">
+            <a:schemeClr val="accent1"/>
+          </a:fillRef>
+          <a:effectRef idx="2">
+            <a:schemeClr val="accent1"/>
+          </a:effectRef>
+          <a:fontRef idx="minor">
+            <a:schemeClr val="lt1"/>
+          </a:fontRef>
+        </p:style>
+        <p:txBody>
+          <a:bodyPr rtlCol="0" anchor="ctr"/>
+          <a:lstStyle/>
+          <a:p>
+            <a:pPr algn="ctr"/>
+          </a:p>
+        </p:txBody>
+      </p:sp>
+      <p:sp>
+        <p:nvSpPr>
+          <p:cNvPr id="19" name="TextBox 18"/>
+          <p:cNvSpPr txBox="1"/>
+          <p:nvPr/>
+        </p:nvSpPr>
+        <p:spPr>
+          <a:xfrm>
+            <a:off x="2678430" y="3380466"/>
+            <a:ext cx="822198" cy="201168"/>
+          </a:xfrm>
+          <a:prstGeom prst="rect">
+            <a:avLst/>
+          </a:prstGeom>
+          <a:noFill/>
+        </p:spPr>
+        <p:txBody>
+          <a:bodyPr wrap="square">
+            <a:spAutoFit/>
+          </a:bodyPr>
+          <a:lstStyle/>
+          <a:p>
+            <a:pPr algn="ctr">
+              <a:defRPr sz="1000" b="1">
+                <a:solidFill>
+                  <a:srgbClr val="E74C3C"/>
+                </a:solidFill>
+              </a:defRPr>
+            </a:pPr>
+            <a:r>
+              <a:t>168</a:t>
+            </a:r>
+          </a:p>
+        </p:txBody>
+      </p:sp>
+      <p:sp>
+        <p:nvSpPr>
+          <p:cNvPr id="20" name="TextBox 19"/>
+          <p:cNvSpPr txBox="1"/>
+          <p:nvPr/>
+        </p:nvSpPr>
+        <p:spPr>
+          <a:xfrm>
+            <a:off x="2678430" y="5806440"/>
+            <a:ext cx="822198" cy="274320"/>
+          </a:xfrm>
+          <a:prstGeom prst="rect">
+            <a:avLst/>
+          </a:prstGeom>
+          <a:noFill/>
+        </p:spPr>
+        <p:txBody>
+          <a:bodyPr wrap="square">
+            <a:spAutoFit/>
+          </a:bodyPr>
+          <a:lstStyle/>
+          <a:p>
+            <a:pPr algn="ctr">
+              <a:defRPr sz="1000" b="0">
+                <a:solidFill>
+                  <a:srgbClr val="555555"/>
+                </a:solidFill>
+              </a:defRPr>
+            </a:pPr>
+            <a:r>
+              <a:t>Q2</a:t>
+            </a:r>
+          </a:p>
+        </p:txBody>
+      </p:sp>
+      <p:sp>
+        <p:nvSpPr>
+          <p:cNvPr id="21" name="Rectangle 20"/>
+          <p:cNvSpPr/>
+          <p:nvPr/>
+        </p:nvSpPr>
+        <p:spPr>
+          <a:xfrm>
+            <a:off x="3880104" y="3135189"/>
+            <a:ext cx="822198" cy="2625531"/>
+          </a:xfrm>
+          <a:prstGeom prst="rect">
+            <a:avLst/>
+          </a:prstGeom>
+          <a:gradFill rotWithShape="1">
+            <a:gsLst>
+              <a:gs pos="0">
+                <a:srgbClr val="6AFFAD"/>
+              </a:gs>
+              <a:gs pos="100000">
+                <a:srgbClr val="2ECC71"/>
+              </a:gs>
+            </a:gsLst>
+            <a:lin scaled="0"/>
+          </a:gradFill>
+          <a:ln>
+            <a:noFill/>
+          </a:ln>
+        </p:spPr>
+        <p:style>
+          <a:lnRef idx="1">
+            <a:schemeClr val="accent1"/>
+          </a:lnRef>
+          <a:fillRef idx="3">
+            <a:schemeClr val="accent1"/>
+          </a:fillRef>
+          <a:effectRef idx="2">
+            <a:schemeClr val="accent1"/>
+          </a:effectRef>
+          <a:fontRef idx="minor">
+            <a:schemeClr val="lt1"/>
+          </a:fontRef>
+        </p:style>
+        <p:txBody>
+          <a:bodyPr rtlCol="0" anchor="ctr"/>
+          <a:lstStyle/>
+          <a:p>
+            <a:pPr algn="ctr"/>
+          </a:p>
+        </p:txBody>
+      </p:sp>
+      <p:sp>
+        <p:nvSpPr>
+          <p:cNvPr id="22" name="TextBox 21"/>
+          <p:cNvSpPr txBox="1"/>
+          <p:nvPr/>
+        </p:nvSpPr>
+        <p:spPr>
+          <a:xfrm>
+            <a:off x="3880104" y="2906589"/>
+            <a:ext cx="822198" cy="201168"/>
+          </a:xfrm>
+          <a:prstGeom prst="rect">
+            <a:avLst/>
+          </a:prstGeom>
+          <a:noFill/>
+        </p:spPr>
+        <p:txBody>
+          <a:bodyPr wrap="square">
+            <a:spAutoFit/>
+          </a:bodyPr>
+          <a:lstStyle/>
+          <a:p>
+            <a:pPr algn="ctr">
+              <a:defRPr sz="1000" b="1">
+                <a:solidFill>
+                  <a:srgbClr val="2ECC71"/>
+                </a:solidFill>
+              </a:defRPr>
+            </a:pPr>
+            <a:r>
+              <a:t>205</a:t>
+            </a:r>
+          </a:p>
+        </p:txBody>
+      </p:sp>
+      <p:sp>
+        <p:nvSpPr>
+          <p:cNvPr id="23" name="TextBox 22"/>
+          <p:cNvSpPr txBox="1"/>
+          <p:nvPr/>
+        </p:nvSpPr>
+        <p:spPr>
+          <a:xfrm>
+            <a:off x="3880104" y="5806440"/>
+            <a:ext cx="822198" cy="274320"/>
+          </a:xfrm>
+          <a:prstGeom prst="rect">
+            <a:avLst/>
+          </a:prstGeom>
+          <a:noFill/>
+        </p:spPr>
+        <p:txBody>
+          <a:bodyPr wrap="square">
+            <a:spAutoFit/>
+          </a:bodyPr>
+          <a:lstStyle/>
+          <a:p>
+            <a:pPr algn="ctr">
+              <a:defRPr sz="1000" b="0">
+                <a:solidFill>
+                  <a:srgbClr val="555555"/>
+                </a:solidFill>
+              </a:defRPr>
+            </a:pPr>
+            <a:r>
+              <a:t>Q3</a:t>
+            </a:r>
+          </a:p>
+        </p:txBody>
+      </p:sp>
+      <p:sp>
+        <p:nvSpPr>
+          <p:cNvPr id="24" name="Rectangle 23"/>
+          <p:cNvSpPr/>
+          <p:nvPr/>
+        </p:nvSpPr>
+        <p:spPr>
+          <a:xfrm>
+            <a:off x="5081778" y="3429761"/>
+            <a:ext cx="822198" cy="2330959"/>
+          </a:xfrm>
+          <a:prstGeom prst="rect">
+            <a:avLst/>
+          </a:prstGeom>
+          <a:gradFill rotWithShape="1">
+            <a:gsLst>
+              <a:gs pos="0">
+                <a:srgbClr val="D795F2"/>
+              </a:gs>
+              <a:gs pos="100000">
+                <a:srgbClr val="9B59B6"/>
+              </a:gs>
+            </a:gsLst>
+            <a:lin scaled="0"/>
+          </a:gradFill>
+          <a:ln>
+            <a:noFill/>
+          </a:ln>
+        </p:spPr>
+        <p:style>
+          <a:lnRef idx="1">
+            <a:schemeClr val="accent1"/>
+          </a:lnRef>
+          <a:fillRef idx="3">
+            <a:schemeClr val="accent1"/>
+          </a:fillRef>
+          <a:effectRef idx="2">
+            <a:schemeClr val="accent1"/>
+          </a:effectRef>
+          <a:fontRef idx="minor">
+            <a:schemeClr val="lt1"/>
+          </a:fontRef>
+        </p:style>
+        <p:txBody>
+          <a:bodyPr rtlCol="0" anchor="ctr"/>
+          <a:lstStyle/>
+          <a:p>
+            <a:pPr algn="ctr"/>
+          </a:p>
+        </p:txBody>
+      </p:sp>
+      <p:sp>
+        <p:nvSpPr>
+          <p:cNvPr id="25" name="TextBox 24"/>
+          <p:cNvSpPr txBox="1"/>
+          <p:nvPr/>
+        </p:nvSpPr>
+        <p:spPr>
+          <a:xfrm>
+            <a:off x="5081778" y="3201161"/>
+            <a:ext cx="822198" cy="201168"/>
+          </a:xfrm>
+          <a:prstGeom prst="rect">
+            <a:avLst/>
+          </a:prstGeom>
+          <a:noFill/>
+        </p:spPr>
+        <p:txBody>
+          <a:bodyPr wrap="square">
+            <a:spAutoFit/>
+          </a:bodyPr>
+          <a:lstStyle/>
+          <a:p>
+            <a:pPr algn="ctr">
+              <a:defRPr sz="1000" b="1">
+                <a:solidFill>
+                  <a:srgbClr val="9B59B6"/>
+                </a:solidFill>
+              </a:defRPr>
+            </a:pPr>
+            <a:r>
+              <a:t>182</a:t>
+            </a:r>
+          </a:p>
+        </p:txBody>
+      </p:sp>
+      <p:sp>
+        <p:nvSpPr>
+          <p:cNvPr id="26" name="TextBox 25"/>
+          <p:cNvSpPr txBox="1"/>
+          <p:nvPr/>
+        </p:nvSpPr>
+        <p:spPr>
+          <a:xfrm>
+            <a:off x="5081778" y="5806440"/>
+            <a:ext cx="822198" cy="274320"/>
+          </a:xfrm>
+          <a:prstGeom prst="rect">
+            <a:avLst/>
+          </a:prstGeom>
+          <a:noFill/>
+        </p:spPr>
+        <p:txBody>
+          <a:bodyPr wrap="square">
+            <a:spAutoFit/>
+          </a:bodyPr>
+          <a:lstStyle/>
+          <a:p>
+            <a:pPr algn="ctr">
+              <a:defRPr sz="1000" b="0">
+                <a:solidFill>
+                  <a:srgbClr val="555555"/>
+                </a:solidFill>
+              </a:defRPr>
+            </a:pPr>
+            <a:r>
+              <a:t>Q4</a:t>
+            </a:r>
+          </a:p>
+        </p:txBody>
+      </p:sp>
+      <p:sp>
+        <p:nvSpPr>
+          <p:cNvPr id="27" name="Rectangle 26"/>
+          <p:cNvSpPr/>
+          <p:nvPr/>
+        </p:nvSpPr>
+        <p:spPr>
+          <a:xfrm>
+            <a:off x="6283452" y="2610083"/>
+            <a:ext cx="822198" cy="3150637"/>
+          </a:xfrm>
+          <a:prstGeom prst="rect">
+            <a:avLst/>
+          </a:prstGeom>
+          <a:gradFill rotWithShape="1">
+            <a:gsLst>
+              <a:gs pos="0">
+                <a:srgbClr val="FFFF4B"/>
+              </a:gs>
+              <a:gs pos="100000">
+                <a:srgbClr val="F1C40F"/>
+              </a:gs>
+            </a:gsLst>
+            <a:lin scaled="0"/>
+          </a:gradFill>
+          <a:ln>
+            <a:noFill/>
+          </a:ln>
+        </p:spPr>
+        <p:style>
+          <a:lnRef idx="1">
+            <a:schemeClr val="accent1"/>
+          </a:lnRef>
+          <a:fillRef idx="3">
+            <a:schemeClr val="accent1"/>
+          </a:fillRef>
+          <a:effectRef idx="2">
+            <a:schemeClr val="accent1"/>
+          </a:effectRef>
+          <a:fontRef idx="minor">
+            <a:schemeClr val="lt1"/>
+          </a:fontRef>
+        </p:style>
+        <p:txBody>
+          <a:bodyPr rtlCol="0" anchor="ctr"/>
+          <a:lstStyle/>
+          <a:p>
+            <a:pPr algn="ctr"/>
+          </a:p>
+        </p:txBody>
+      </p:sp>
+      <p:sp>
+        <p:nvSpPr>
+          <p:cNvPr id="28" name="TextBox 27"/>
+          <p:cNvSpPr txBox="1"/>
+          <p:nvPr/>
+        </p:nvSpPr>
+        <p:spPr>
+          <a:xfrm>
+            <a:off x="6283452" y="2381483"/>
+            <a:ext cx="822198" cy="201168"/>
+          </a:xfrm>
+          <a:prstGeom prst="rect">
+            <a:avLst/>
+          </a:prstGeom>
+          <a:noFill/>
+        </p:spPr>
+        <p:txBody>
+          <a:bodyPr wrap="square">
+            <a:spAutoFit/>
+          </a:bodyPr>
+          <a:lstStyle/>
+          <a:p>
+            <a:pPr algn="ctr">
+              <a:defRPr sz="1000" b="1">
+                <a:solidFill>
+                  <a:srgbClr val="F1C40F"/>
+                </a:solidFill>
+              </a:defRPr>
+            </a:pPr>
+            <a:r>
+              <a:t>246</a:t>
+            </a:r>
+          </a:p>
+        </p:txBody>
+      </p:sp>
+      <p:sp>
+        <p:nvSpPr>
+          <p:cNvPr id="29" name="TextBox 28"/>
+          <p:cNvSpPr txBox="1"/>
+          <p:nvPr/>
+        </p:nvSpPr>
+        <p:spPr>
+          <a:xfrm>
+            <a:off x="6283452" y="5806440"/>
+            <a:ext cx="822198" cy="274320"/>
+          </a:xfrm>
+          <a:prstGeom prst="rect">
+            <a:avLst/>
+          </a:prstGeom>
+          <a:noFill/>
+        </p:spPr>
+        <p:txBody>
+          <a:bodyPr wrap="square">
+            <a:spAutoFit/>
+          </a:bodyPr>
+          <a:lstStyle/>
+          <a:p>
+            <a:pPr algn="ctr">
+              <a:defRPr sz="1000" b="0">
+                <a:solidFill>
+                  <a:srgbClr val="555555"/>
+                </a:solidFill>
+              </a:defRPr>
+            </a:pPr>
+            <a:r>
+              <a:t>Q5</a:t>
+            </a:r>
+          </a:p>
+        </p:txBody>
+      </p:sp>
+      <p:sp>
+        <p:nvSpPr>
+          <p:cNvPr id="30" name="Rectangle 29"/>
+          <p:cNvSpPr/>
+          <p:nvPr/>
+        </p:nvSpPr>
+        <p:spPr>
+          <a:xfrm>
+            <a:off x="7485126" y="1944094"/>
+            <a:ext cx="822198" cy="3816626"/>
+          </a:xfrm>
+          <a:prstGeom prst="rect">
+            <a:avLst/>
+          </a:prstGeom>
+          <a:gradFill rotWithShape="1">
+            <a:gsLst>
+              <a:gs pos="0">
+                <a:srgbClr val="FFBA5E"/>
+              </a:gs>
+              <a:gs pos="100000">
+                <a:srgbClr val="E67E22"/>
+              </a:gs>
+            </a:gsLst>
+            <a:lin scaled="0"/>
+          </a:gradFill>
+          <a:ln>
+            <a:noFill/>
+          </a:ln>
+        </p:spPr>
+        <p:style>
+          <a:lnRef idx="1">
+            <a:schemeClr val="accent1"/>
+          </a:lnRef>
+          <a:fillRef idx="3">
+            <a:schemeClr val="accent1"/>
+          </a:fillRef>
+          <a:effectRef idx="2">
+            <a:schemeClr val="accent1"/>
+          </a:effectRef>
+          <a:fontRef idx="minor">
+            <a:schemeClr val="lt1"/>
+          </a:fontRef>
+        </p:style>
+        <p:txBody>
+          <a:bodyPr rtlCol="0" anchor="ctr"/>
+          <a:lstStyle/>
+          <a:p>
+            <a:pPr algn="ctr"/>
+          </a:p>
+        </p:txBody>
+      </p:sp>
+      <p:sp>
+        <p:nvSpPr>
+          <p:cNvPr id="31" name="TextBox 30"/>
+          <p:cNvSpPr txBox="1"/>
+          <p:nvPr/>
+        </p:nvSpPr>
+        <p:spPr>
+          <a:xfrm>
+            <a:off x="7485126" y="1715494"/>
+            <a:ext cx="822198" cy="201168"/>
+          </a:xfrm>
+          <a:prstGeom prst="rect">
+            <a:avLst/>
+          </a:prstGeom>
+          <a:noFill/>
+        </p:spPr>
+        <p:txBody>
+          <a:bodyPr wrap="square">
+            <a:spAutoFit/>
+          </a:bodyPr>
+          <a:lstStyle/>
+          <a:p>
+            <a:pPr algn="ctr">
+              <a:defRPr sz="1000" b="1">
+                <a:solidFill>
+                  <a:srgbClr val="E67E22"/>
+                </a:solidFill>
+              </a:defRPr>
+            </a:pPr>
+            <a:r>
+              <a:t>298</a:t>
+            </a:r>
+          </a:p>
+        </p:txBody>
+      </p:sp>
+      <p:sp>
+        <p:nvSpPr>
+          <p:cNvPr id="32" name="TextBox 31"/>
+          <p:cNvSpPr txBox="1"/>
+          <p:nvPr/>
+        </p:nvSpPr>
+        <p:spPr>
+          <a:xfrm>
+            <a:off x="7485126" y="5806440"/>
+            <a:ext cx="822198" cy="274320"/>
+          </a:xfrm>
+          <a:prstGeom prst="rect">
+            <a:avLst/>
+          </a:prstGeom>
+          <a:noFill/>
+        </p:spPr>
+        <p:txBody>
+          <a:bodyPr wrap="square">
+            <a:spAutoFit/>
+          </a:bodyPr>
+          <a:lstStyle/>
+          <a:p>
+            <a:pPr algn="ctr">
+              <a:defRPr sz="1000" b="0">
+                <a:solidFill>
+                  <a:srgbClr val="555555"/>
+                </a:solidFill>
+              </a:defRPr>
+            </a:pPr>
+            <a:r>
+              <a:t>Q6</a:t>
+            </a:r>
+          </a:p>
+        </p:txBody>
+      </p:sp>
     </p:spTree>
   </p:cSld>
   <p:clrMapOvr>
     <a:masterClrMapping/>
   </p:clrMapOvr>
+  <p:timing>
+    <p:tnLst>
+      <p:seq concurrent="1" nextAc="seek">
+        <p:childTnLst>
+          <p:seq concurrent="1" nextAc="seek">
+            <p:childTnLst>
+              <p:anim effect="grow" calcmode="lin" valueType="num">
+                <p:cBhvr>
+                  <p:stCondLst>
+                    <p:cond delay="0"/>
+                  </p:stCondLst>
+                  <p:duration>600</p:duration>
+                  <p:tgtEl>
+                    <p:spTgt spid="15"/>
+                  </p:tgtEl>
+                </p:cBhvr>
+                <p:tavLst>
+                  <p:tav pos="0">
+                    <p:val>
+                      <p:strVal val="0%"/>
+                    </p:val>
+                  </p:tav>
+                  <p:tav pos="100000">
+                    <p:val>
+                      <p:strVal val="100%"/>
+                    </p:val>
+                  </p:tav>
+                </p:tavLst>
+              </p:anim>
+            </p:childTnLst>
+            <p:nodeType>clickEffect</p:nodeType>
+          </p:seq>
+        </p:childTnLst>
+      </p:seq>
+      <p:seq concurrent="1" nextAc="seek">
+        <p:childTnLst>
+          <p:seq concurrent="1" nextAc="seek">
+            <p:childTnLst>
+              <p:set>
+                <p:cBhvr>
+                  <p:stCondLst>
+                    <p:cond delay="0"/>
+                  </p:stCondLst>
+                  <p:tgtEl>
+                    <p:spTgt spid="16"/>
+                  </p:tgtEl>
+                </p:cBhvr>
+                <p:attrNameLst>
+                  <p:attrName>style.visibility</p:attrName>
+                </p:attrNameLst>
+              </p:set>
+              <p:anim effect="fade" filter="in">
+                <p:cBhvr>
+                  <p:stCondLst>
+                    <p:cond delay="300"/>
+                  </p:stCondLst>
+                  <p:duration>300</p:duration>
+                  <p:tgtEl>
+                    <p:spTgt spid="16"/>
+                  </p:tgtEl>
+                </p:cBhvr>
+              </p:anim>
+            </p:childTnLst>
+            <p:nodeType>clickEffect</p:nodeType>
+          </p:seq>
+        </p:childTnLst>
+      </p:seq>
+      <p:seq concurrent="1" nextAc="seek">
+        <p:childTnLst>
+          <p:seq concurrent="1" nextAc="seek">
+            <p:childTnLst>
+              <p:anim effect="grow" calcmode="lin" valueType="num">
+                <p:cBhvr>
+                  <p:stCondLst>
+                    <p:cond delay="300"/>
+                  </p:stCondLst>
+                  <p:duration>600</p:duration>
+                  <p:tgtEl>
+                    <p:spTgt spid="18"/>
+                  </p:tgtEl>
+                </p:cBhvr>
+                <p:tavLst>
+                  <p:tav pos="0">
+                    <p:val>
+                      <p:strVal val="0%"/>
+                    </p:val>
+                  </p:tav>
+                  <p:tav pos="100000">
+                    <p:val>
+                      <p:strVal val="100%"/>
+                    </p:val>
+                  </p:tav>
+                </p:tavLst>
+              </p:anim>
+            </p:childTnLst>
+            <p:nodeType>clickEffect</p:nodeType>
+          </p:seq>
+        </p:childTnLst>
+      </p:seq>
+      <p:seq concurrent="1" nextAc="seek">
+        <p:childTnLst>
+          <p:seq concurrent="1" nextAc="seek">
+            <p:childTnLst>
+              <p:set>
+                <p:cBhvr>
+                  <p:stCondLst>
+                    <p:cond delay="0"/>
+                  </p:stCondLst>
+                  <p:tgtEl>
+                    <p:spTgt spid="19"/>
+                  </p:tgtEl>
+                </p:cBhvr>
+                <p:attrNameLst>
+                  <p:attrName>style.visibility</p:attrName>
+                </p:attrNameLst>
+              </p:set>
+              <p:anim effect="fade" filter="in">
+                <p:cBhvr>
+                  <p:stCondLst>
+                    <p:cond delay="600"/>
+                  </p:stCondLst>
+                  <p:duration>300</p:duration>
+                  <p:tgtEl>
+                    <p:spTgt spid="19"/>
+                  </p:tgtEl>
+                </p:cBhvr>
+              </p:anim>
+            </p:childTnLst>
+            <p:nodeType>clickEffect</p:nodeType>
+          </p:seq>
+        </p:childTnLst>
+      </p:seq>
+      <p:seq concurrent="1" nextAc="seek">
+        <p:childTnLst>
+          <p:seq concurrent="1" nextAc="seek">
+            <p:childTnLst>
+              <p:anim effect="grow" calcmode="lin" valueType="num">
+                <p:cBhvr>
+                  <p:stCondLst>
+                    <p:cond delay="600"/>
+                  </p:stCondLst>
+                  <p:duration>600</p:duration>
+                  <p:tgtEl>
+                    <p:spTgt spid="21"/>
+                  </p:tgtEl>
+                </p:cBhvr>
+                <p:tavLst>
+                  <p:tav pos="0">
+                    <p:val>
+                      <p:strVal val="0%"/>
+                    </p:val>
+                  </p:tav>
+                  <p:tav pos="100000">
+                    <p:val>
+                      <p:strVal val="100%"/>
+                    </p:val>
+                  </p:tav>
+                </p:tavLst>
+              </p:anim>
+            </p:childTnLst>
+            <p:nodeType>clickEffect</p:nodeType>
+          </p:seq>
+        </p:childTnLst>
+      </p:seq>
+      <p:seq concurrent="1" nextAc="seek">
+        <p:childTnLst>
+          <p:seq concurrent="1" nextAc="seek">
+            <p:childTnLst>
+              <p:set>
+                <p:cBhvr>
+                  <p:stCondLst>
+                    <p:cond delay="0"/>
+                  </p:stCondLst>
+                  <p:tgtEl>
+                    <p:spTgt spid="22"/>
+                  </p:tgtEl>
+                </p:cBhvr>
+                <p:attrNameLst>
+                  <p:attrName>style.visibility</p:attrName>
+                </p:attrNameLst>
+              </p:set>
+              <p:anim effect="fade" filter="in">
+                <p:cBhvr>
+                  <p:stCondLst>
+                    <p:cond delay="900"/>
+                  </p:stCondLst>
+                  <p:duration>300</p:duration>
+                  <p:tgtEl>
+                    <p:spTgt spid="22"/>
+                  </p:tgtEl>
+                </p:cBhvr>
+              </p:anim>
+            </p:childTnLst>
+            <p:nodeType>clickEffect</p:nodeType>
+          </p:seq>
+        </p:childTnLst>
+      </p:seq>
+      <p:seq concurrent="1" nextAc="seek">
+        <p:childTnLst>
+          <p:seq concurrent="1" nextAc="seek">
+            <p:childTnLst>
+              <p:anim effect="grow" calcmode="lin" valueType="num">
+                <p:cBhvr>
+                  <p:stCondLst>
+                    <p:cond delay="900"/>
+                  </p:stCondLst>
+                  <p:duration>600</p:duration>
+                  <p:tgtEl>
+                    <p:spTgt spid="24"/>
+                  </p:tgtEl>
+                </p:cBhvr>
+                <p:tavLst>
+                  <p:tav pos="0">
+                    <p:val>
+                      <p:strVal val="0%"/>
+                    </p:val>
+                  </p:tav>
+                  <p:tav pos="100000">
+                    <p:val>
+                      <p:strVal val="100%"/>
+                    </p:val>
+                  </p:tav>
+                </p:tavLst>
+              </p:anim>
+            </p:childTnLst>
+            <p:nodeType>clickEffect</p:nodeType>
+          </p:seq>
+        </p:childTnLst>
+      </p:seq>
+      <p:seq concurrent="1" nextAc="seek">
+        <p:childTnLst>
+          <p:seq concurrent="1" nextAc="seek">
+            <p:childTnLst>
+              <p:set>
+                <p:cBhvr>
+                  <p:stCondLst>
+                    <p:cond delay="0"/>
+                  </p:stCondLst>
+                  <p:tgtEl>
+                    <p:spTgt spid="25"/>
+                  </p:tgtEl>
+                </p:cBhvr>
+                <p:attrNameLst>
+                  <p:attrName>style.visibility</p:attrName>
+                </p:attrNameLst>
+              </p:set>
+              <p:anim effect="fade" filter="in">
+                <p:cBhvr>
+                  <p:stCondLst>
+                    <p:cond delay="1200"/>
+                  </p:stCondLst>
+                  <p:duration>300</p:duration>
+                  <p:tgtEl>
+                    <p:spTgt spid="25"/>
+                  </p:tgtEl>
+                </p:cBhvr>
+              </p:anim>
+            </p:childTnLst>
+            <p:nodeType>clickEffect</p:nodeType>
+          </p:seq>
+        </p:childTnLst>
+      </p:seq>
+      <p:seq concurrent="1" nextAc="seek">
+        <p:childTnLst>
+          <p:seq concurrent="1" nextAc="seek">
+            <p:childTnLst>
+              <p:anim effect="grow" calcmode="lin" valueType="num">
+                <p:cBhvr>
+                  <p:stCondLst>
+                    <p:cond delay="1200"/>
+                  </p:stCondLst>
+                  <p:duration>600</p:duration>
+                  <p:tgtEl>
+                    <p:spTgt spid="27"/>
+                  </p:tgtEl>
+                </p:cBhvr>
+                <p:tavLst>
+                  <p:tav pos="0">
+                    <p:val>
+                      <p:strVal val="0%"/>
+                    </p:val>
+                  </p:tav>
+                  <p:tav pos="100000">
+                    <p:val>
+                      <p:strVal val="100%"/>
+                    </p:val>
+                  </p:tav>
+                </p:tavLst>
+              </p:anim>
+            </p:childTnLst>
+            <p:nodeType>clickEffect</p:nodeType>
+          </p:seq>
+        </p:childTnLst>
+      </p:seq>
+      <p:seq concurrent="1" nextAc="seek">
+        <p:childTnLst>
+          <p:seq concurrent="1" nextAc="seek">
+            <p:childTnLst>
+              <p:set>
+                <p:cBhvr>
+                  <p:stCondLst>
+                    <p:cond delay="0"/>
+                  </p:stCondLst>
+                  <p:tgtEl>
+                    <p:spTgt spid="28"/>
+                  </p:tgtEl>
+                </p:cBhvr>
+                <p:attrNameLst>
+                  <p:attrName>style.visibility</p:attrName>
+                </p:attrNameLst>
+              </p:set>
+              <p:anim effect="fade" filter="in">
+                <p:cBhvr>
+                  <p:stCondLst>
+                    <p:cond delay="1500"/>
+                  </p:stCondLst>
+                  <p:duration>300</p:duration>
+                  <p:tgtEl>
+                    <p:spTgt spid="28"/>
+                  </p:tgtEl>
+                </p:cBhvr>
+              </p:anim>
+            </p:childTnLst>
+            <p:nodeType>clickEffect</p:nodeType>
+          </p:seq>
+        </p:childTnLst>
+      </p:seq>
+      <p:seq concurrent="1" nextAc="seek">
+        <p:childTnLst>
+          <p:seq concurrent="1" nextAc="seek">
+            <p:childTnLst>
+              <p:anim effect="grow" calcmode="lin" valueType="num">
+                <p:cBhvr>
+                  <p:stCondLst>
+                    <p:cond delay="1500"/>
+                  </p:stCondLst>
+                  <p:duration>600</p:duration>
+                  <p:tgtEl>
+                    <p:spTgt spid="30"/>
+                  </p:tgtEl>
+                </p:cBhvr>
+                <p:tavLst>
+                  <p:tav pos="0">
+                    <p:val>
+                      <p:strVal val="0%"/>
+                    </p:val>
+                  </p:tav>
+                  <p:tav pos="100000">
+                    <p:val>
+                      <p:strVal val="100%"/>
+                    </p:val>
+                  </p:tav>
+                </p:tavLst>
+              </p:anim>
+            </p:childTnLst>
+            <p:nodeType>clickEffect</p:nodeType>
+          </p:seq>
+        </p:childTnLst>
+      </p:seq>
+      <p:seq concurrent="1" nextAc="seek">
+        <p:childTnLst>
+          <p:seq concurrent="1" nextAc="seek">
+            <p:childTnLst>
+              <p:set>
+                <p:cBhvr>
+                  <p:stCondLst>
+                    <p:cond delay="0"/>
+                  </p:stCondLst>
+                  <p:tgtEl>
+                    <p:spTgt spid="31"/>
+                  </p:tgtEl>
+                </p:cBhvr>
+                <p:attrNameLst>
+                  <p:attrName>style.visibility</p:attrName>
+                </p:attrNameLst>
+              </p:set>
+              <p:anim effect="fade" filter="in">
+                <p:cBhvr>
+                  <p:stCondLst>
+                    <p:cond delay="1800"/>
+                  </p:stCondLst>
+                  <p:duration>300</p:duration>
+                  <p:tgtEl>
+                    <p:spTgt spid="31"/>
+                  </p:tgtEl>
+                </p:cBhvr>
+              </p:anim>
+            </p:childTnLst>
+            <p:nodeType>clickEffect</p:nodeType>
+          </p:seq>
+        </p:childTnLst>
+      </p:seq>
+    </p:tnLst>
+  </p:timing>
 </p:sld>
 </file>
 
